--- a/public/fun/cards/food/food-38.pptx
+++ b/public/fun/cards/food/food-38.pptx
@@ -3085,7 +3085,7 @@
     <p:bg>
       <p:bgPr>
         <a:solidFill>
-          <a:srgbClr val="FBF8F2"/>
+          <a:srgbClr val="ECEEFF"/>
         </a:solidFill>
         <a:effectLst/>
       </p:bgPr>
@@ -3105,14 +3105,14 @@
         </p:nvSpPr>
         <p:spPr>
           <a:xfrm>
-            <a:off x="1944000" y="216000"/>
-            <a:ext cx="10800" cy="1368000"/>
+            <a:off x="0" y="0"/>
+            <a:ext cx="1152000" cy="1800000"/>
           </a:xfrm>
           <a:prstGeom prst="rect">
             <a:avLst/>
           </a:prstGeom>
           <a:solidFill>
-            <a:srgbClr val="3B9158"/>
+            <a:srgbClr val="3D5AFE"/>
           </a:solidFill>
           <a:ln>
             <a:noFill/>
@@ -3128,14 +3128,43 @@
       </p:sp>
       <p:sp>
         <p:nvSpPr>
-          <p:cNvPr id="3" name="텍스트"/>
+          <p:cNvPr id="3" name="Oval 2"/>
+          <p:cNvSpPr/>
+          <p:nvPr/>
+        </p:nvSpPr>
+        <p:spPr>
+          <a:xfrm>
+            <a:off x="295200" y="619200"/>
+            <a:ext cx="561600" cy="561600"/>
+          </a:xfrm>
+          <a:prstGeom prst="ellipse">
+            <a:avLst/>
+          </a:prstGeom>
+          <a:noFill/>
+          <a:ln w="10800">
+            <a:solidFill>
+              <a:srgbClr val="FFFFFF"/>
+            </a:solidFill>
+          </a:ln>
+        </p:spPr>
+        <p:txBody>
+          <a:bodyPr rtlCol="0" anchor="ctr"/>
+          <a:lstStyle/>
+          <a:p>
+            <a:pPr algn="ctr"/>
+          </a:p>
+        </p:txBody>
+      </p:sp>
+      <p:sp>
+        <p:nvSpPr>
+          <p:cNvPr id="4" name="텍스트"/>
           <p:cNvSpPr txBox="1"/>
           <p:nvPr/>
         </p:nvSpPr>
         <p:spPr>
           <a:xfrm>
-            <a:off x="216000" y="201600"/>
-            <a:ext cx="1584000" cy="100800"/>
+            <a:off x="216000" y="684000"/>
+            <a:ext cx="720000" cy="432000"/>
           </a:xfrm>
           <a:prstGeom prst="rect">
             <a:avLst/>
@@ -3143,94 +3172,26 @@
           <a:noFill/>
         </p:spPr>
         <p:txBody>
-          <a:bodyPr wrap="square" lIns="0" rIns="0" tIns="0" bIns="0" anchor="t">
+          <a:bodyPr wrap="square" lIns="0" rIns="0" tIns="0" bIns="0" anchor="ctr">
             <a:spAutoFit/>
           </a:bodyPr>
           <a:lstStyle/>
           <a:p>
-            <a:pPr algn="l">
+            <a:pPr algn="ctr">
               <a:lnSpc>
-                <a:spcPts val="1015"/>
+                <a:spcPts val="4930"/>
               </a:lnSpc>
             </a:pPr>
             <a:r>
-              <a:rPr sz="700" b="1" spc="300">
+              <a:rPr sz="3400" b="1">
                 <a:solidFill>
-                  <a:srgbClr val="83676A"/>
+                  <a:srgbClr val="FFFFFF"/>
                 </a:solidFill>
                 <a:latin typeface="맑은 고딕"/>
                 <a:ea typeface="맑은 고딕"/>
               </a:rPr>
-              <a:t>상호명</a:t>
-            </a:r>
-          </a:p>
-        </p:txBody>
-      </p:sp>
-      <p:sp>
-        <p:nvSpPr>
-          <p:cNvPr id="4" name="Freeform 3"/>
-          <p:cNvSpPr/>
-          <p:nvPr/>
-        </p:nvSpPr>
-        <p:spPr>
-          <a:xfrm>
-            <a:off x="292053" y="430704"/>
-            <a:ext cx="207894" cy="197718"/>
-          </a:xfrm>
-          <a:custGeom>
-            <a:avLst/>
-            <a:gdLst/>
-            <a:ahLst/>
-            <a:cxnLst/>
-            <a:rect l="l" t="t" r="r" b="b"/>
-            <a:pathLst>
-              <a:path w="207894" h="197718">
-                <a:moveTo>
-                  <a:pt x="103947" y="0"/>
-                </a:moveTo>
-                <a:lnTo>
-                  <a:pt x="130482" y="72774"/>
-                </a:lnTo>
-                <a:lnTo>
-                  <a:pt x="207894" y="75522"/>
-                </a:lnTo>
-                <a:lnTo>
-                  <a:pt x="146881" y="123246"/>
-                </a:lnTo>
-                <a:lnTo>
-                  <a:pt x="168190" y="197718"/>
-                </a:lnTo>
-                <a:lnTo>
-                  <a:pt x="103947" y="154440"/>
-                </a:lnTo>
-                <a:lnTo>
-                  <a:pt x="39704" y="197718"/>
-                </a:lnTo>
-                <a:lnTo>
-                  <a:pt x="61013" y="123246"/>
-                </a:lnTo>
-                <a:lnTo>
-                  <a:pt x="0" y="75522"/>
-                </a:lnTo>
-                <a:lnTo>
-                  <a:pt x="77412" y="72774"/>
-                </a:lnTo>
-                <a:close/>
-              </a:path>
-            </a:pathLst>
-          </a:custGeom>
-          <a:solidFill>
-            <a:srgbClr val="3B9158"/>
-          </a:solidFill>
-          <a:ln>
-            <a:noFill/>
-          </a:ln>
-        </p:spPr>
-        <p:txBody>
-          <a:bodyPr rtlCol="0" anchor="ctr"/>
-          <a:lstStyle/>
-          <a:p>
-            <a:pPr algn="ctr"/>
+              <a:t>피</a:t>
+            </a:r>
           </a:p>
         </p:txBody>
       </p:sp>
@@ -3242,8 +3203,8 @@
         </p:nvSpPr>
         <p:spPr>
           <a:xfrm>
-            <a:off x="216000" y="972000"/>
-            <a:ext cx="1728000" cy="122400"/>
+            <a:off x="1404000" y="223200"/>
+            <a:ext cx="1584000" cy="133351"/>
           </a:xfrm>
           <a:prstGeom prst="rect">
             <a:avLst/>
@@ -3258,18 +3219,18 @@
           <a:p>
             <a:pPr algn="l">
               <a:lnSpc>
-                <a:spcPts val="1232"/>
+                <a:spcPts val="1015"/>
               </a:lnSpc>
             </a:pPr>
             <a:r>
-              <a:rPr sz="850" b="1">
+              <a:rPr sz="700" b="1" spc="200">
                 <a:solidFill>
-                  <a:srgbClr val="327B4B"/>
+                  <a:srgbClr val="222F72"/>
                 </a:solidFill>
                 <a:latin typeface="맑은 고딕"/>
                 <a:ea typeface="맑은 고딕"/>
               </a:rPr>
-              <a:t>로스터</a:t>
+              <a:t>상호명</a:t>
             </a:r>
           </a:p>
         </p:txBody>
@@ -3282,8 +3243,8 @@
         </p:nvSpPr>
         <p:spPr>
           <a:xfrm>
-            <a:off x="216000" y="1123200"/>
-            <a:ext cx="1728000" cy="346712"/>
+            <a:off x="1404000" y="540000"/>
+            <a:ext cx="1584000" cy="360000"/>
           </a:xfrm>
           <a:prstGeom prst="rect">
             <a:avLst/>
@@ -3298,13 +3259,13 @@
           <a:p>
             <a:pPr algn="l">
               <a:lnSpc>
-                <a:spcPts val="3045"/>
+                <a:spcPts val="3190"/>
               </a:lnSpc>
             </a:pPr>
             <a:r>
-              <a:rPr sz="2100" b="1" spc="50">
+              <a:rPr sz="2200" b="1">
                 <a:solidFill>
-                  <a:srgbClr val="431920"/>
+                  <a:srgbClr val="12151C"/>
                 </a:solidFill>
                 <a:latin typeface="맑은 고딕"/>
                 <a:ea typeface="맑은 고딕"/>
@@ -3322,8 +3283,8 @@
         </p:nvSpPr>
         <p:spPr>
           <a:xfrm>
-            <a:off x="2073600" y="540000"/>
-            <a:ext cx="122400" cy="168911"/>
+            <a:off x="1404000" y="943200"/>
+            <a:ext cx="1584000" cy="171451"/>
           </a:xfrm>
           <a:prstGeom prst="rect">
             <a:avLst/>
@@ -3338,32 +3299,61 @@
           <a:p>
             <a:pPr algn="l">
               <a:lnSpc>
-                <a:spcPts val="1015"/>
+                <a:spcPts val="1305"/>
               </a:lnSpc>
             </a:pPr>
             <a:r>
-              <a:rPr sz="700" b="1">
+              <a:rPr sz="900" b="0">
                 <a:solidFill>
-                  <a:srgbClr val="327B4B"/>
+                  <a:srgbClr val="222F72"/>
                 </a:solidFill>
                 <a:latin typeface="맑은 고딕"/>
                 <a:ea typeface="맑은 고딕"/>
               </a:rPr>
-              <a:t>T</a:t>
-            </a:r>
-          </a:p>
-        </p:txBody>
-      </p:sp>
-      <p:sp>
-        <p:nvSpPr>
-          <p:cNvPr id="8" name="텍스트"/>
+              <a:t>로스터</a:t>
+            </a:r>
+          </a:p>
+        </p:txBody>
+      </p:sp>
+      <p:sp>
+        <p:nvSpPr>
+          <p:cNvPr id="8" name="Rectangle 7"/>
+          <p:cNvSpPr/>
+          <p:nvPr/>
+        </p:nvSpPr>
+        <p:spPr>
+          <a:xfrm>
+            <a:off x="1404000" y="1195200"/>
+            <a:ext cx="144000" cy="18000"/>
+          </a:xfrm>
+          <a:prstGeom prst="rect">
+            <a:avLst/>
+          </a:prstGeom>
+          <a:solidFill>
+            <a:srgbClr val="3D5AFE"/>
+          </a:solidFill>
+          <a:ln>
+            <a:noFill/>
+          </a:ln>
+        </p:spPr>
+        <p:txBody>
+          <a:bodyPr rtlCol="0" anchor="ctr"/>
+          <a:lstStyle/>
+          <a:p>
+            <a:pPr algn="ctr"/>
+          </a:p>
+        </p:txBody>
+      </p:sp>
+      <p:sp>
+        <p:nvSpPr>
+          <p:cNvPr id="9" name="텍스트"/>
           <p:cNvSpPr txBox="1"/>
           <p:nvPr/>
         </p:nvSpPr>
         <p:spPr>
           <a:xfrm>
-            <a:off x="2217600" y="540000"/>
-            <a:ext cx="900000" cy="168911"/>
+            <a:off x="1404000" y="1328400"/>
+            <a:ext cx="331200" cy="99061"/>
           </a:xfrm>
           <a:prstGeom prst="rect">
             <a:avLst/>
@@ -3378,32 +3368,32 @@
           <a:p>
             <a:pPr algn="l">
               <a:lnSpc>
-                <a:spcPts val="1015"/>
+                <a:spcPts val="754"/>
               </a:lnSpc>
             </a:pPr>
             <a:r>
-              <a:rPr sz="700" b="0">
+              <a:rPr sz="520" b="1" spc="120">
                 <a:solidFill>
-                  <a:srgbClr val="431920"/>
+                  <a:srgbClr val="222F72"/>
                 </a:solidFill>
                 <a:latin typeface="맑은 고딕"/>
                 <a:ea typeface="맑은 고딕"/>
               </a:rPr>
-              <a:t>010-1234-5678</a:t>
-            </a:r>
-          </a:p>
-        </p:txBody>
-      </p:sp>
-      <p:sp>
-        <p:nvSpPr>
-          <p:cNvPr id="9" name="텍스트"/>
+              <a:t>TEL</a:t>
+            </a:r>
+          </a:p>
+        </p:txBody>
+      </p:sp>
+      <p:sp>
+        <p:nvSpPr>
+          <p:cNvPr id="10" name="텍스트"/>
           <p:cNvSpPr txBox="1"/>
           <p:nvPr/>
         </p:nvSpPr>
         <p:spPr>
           <a:xfrm>
-            <a:off x="2073600" y="708911"/>
-            <a:ext cx="122400" cy="168911"/>
+            <a:off x="1735200" y="1317600"/>
+            <a:ext cx="1440000" cy="133351"/>
           </a:xfrm>
           <a:prstGeom prst="rect">
             <a:avLst/>
@@ -3422,28 +3412,28 @@
               </a:lnSpc>
             </a:pPr>
             <a:r>
-              <a:rPr sz="700" b="1">
+              <a:rPr sz="700" b="0">
                 <a:solidFill>
-                  <a:srgbClr val="327B4B"/>
+                  <a:srgbClr val="12151C"/>
                 </a:solidFill>
                 <a:latin typeface="맑은 고딕"/>
                 <a:ea typeface="맑은 고딕"/>
               </a:rPr>
-              <a:t>E</a:t>
-            </a:r>
-          </a:p>
-        </p:txBody>
-      </p:sp>
-      <p:sp>
-        <p:nvSpPr>
-          <p:cNvPr id="10" name="텍스트"/>
+              <a:t>010-1234-5678</a:t>
+            </a:r>
+          </a:p>
+        </p:txBody>
+      </p:sp>
+      <p:sp>
+        <p:nvSpPr>
+          <p:cNvPr id="11" name="텍스트"/>
           <p:cNvSpPr txBox="1"/>
           <p:nvPr/>
         </p:nvSpPr>
         <p:spPr>
           <a:xfrm>
-            <a:off x="2217600" y="708911"/>
-            <a:ext cx="900000" cy="168911"/>
+            <a:off x="1404000" y="1458000"/>
+            <a:ext cx="331200" cy="99061"/>
           </a:xfrm>
           <a:prstGeom prst="rect">
             <a:avLst/>
@@ -3458,32 +3448,32 @@
           <a:p>
             <a:pPr algn="l">
               <a:lnSpc>
-                <a:spcPts val="1015"/>
+                <a:spcPts val="754"/>
               </a:lnSpc>
             </a:pPr>
             <a:r>
-              <a:rPr sz="700" b="0">
+              <a:rPr sz="520" b="1" spc="120">
                 <a:solidFill>
-                  <a:srgbClr val="431920"/>
+                  <a:srgbClr val="222F72"/>
                 </a:solidFill>
                 <a:latin typeface="맑은 고딕"/>
                 <a:ea typeface="맑은 고딕"/>
               </a:rPr>
-              <a:t>name@example.com</a:t>
-            </a:r>
-          </a:p>
-        </p:txBody>
-      </p:sp>
-      <p:sp>
-        <p:nvSpPr>
-          <p:cNvPr id="11" name="텍스트"/>
+              <a:t>MAIL</a:t>
+            </a:r>
+          </a:p>
+        </p:txBody>
+      </p:sp>
+      <p:sp>
+        <p:nvSpPr>
+          <p:cNvPr id="12" name="텍스트"/>
           <p:cNvSpPr txBox="1"/>
           <p:nvPr/>
         </p:nvSpPr>
         <p:spPr>
           <a:xfrm>
-            <a:off x="2073600" y="877822"/>
-            <a:ext cx="122400" cy="168911"/>
+            <a:off x="1735200" y="1447200"/>
+            <a:ext cx="1440000" cy="133351"/>
           </a:xfrm>
           <a:prstGeom prst="rect">
             <a:avLst/>
@@ -3502,28 +3492,28 @@
               </a:lnSpc>
             </a:pPr>
             <a:r>
-              <a:rPr sz="700" b="1">
+              <a:rPr sz="700" b="0">
                 <a:solidFill>
-                  <a:srgbClr val="327B4B"/>
+                  <a:srgbClr val="12151C"/>
                 </a:solidFill>
                 <a:latin typeface="맑은 고딕"/>
                 <a:ea typeface="맑은 고딕"/>
               </a:rPr>
-              <a:t>A</a:t>
-            </a:r>
-          </a:p>
-        </p:txBody>
-      </p:sp>
-      <p:sp>
-        <p:nvSpPr>
-          <p:cNvPr id="12" name="텍스트"/>
+              <a:t>name@example.com</a:t>
+            </a:r>
+          </a:p>
+        </p:txBody>
+      </p:sp>
+      <p:sp>
+        <p:nvSpPr>
+          <p:cNvPr id="13" name="텍스트"/>
           <p:cNvSpPr txBox="1"/>
           <p:nvPr/>
         </p:nvSpPr>
         <p:spPr>
           <a:xfrm>
-            <a:off x="2217600" y="877822"/>
-            <a:ext cx="900000" cy="168911"/>
+            <a:off x="1404000" y="1587600"/>
+            <a:ext cx="331200" cy="99061"/>
           </a:xfrm>
           <a:prstGeom prst="rect">
             <a:avLst/>
@@ -3538,13 +3528,53 @@
           <a:p>
             <a:pPr algn="l">
               <a:lnSpc>
+                <a:spcPts val="754"/>
+              </a:lnSpc>
+            </a:pPr>
+            <a:r>
+              <a:rPr sz="520" b="1" spc="120">
+                <a:solidFill>
+                  <a:srgbClr val="222F72"/>
+                </a:solidFill>
+                <a:latin typeface="맑은 고딕"/>
+                <a:ea typeface="맑은 고딕"/>
+              </a:rPr>
+              <a:t>ADDR</a:t>
+            </a:r>
+          </a:p>
+        </p:txBody>
+      </p:sp>
+      <p:sp>
+        <p:nvSpPr>
+          <p:cNvPr id="14" name="텍스트"/>
+          <p:cNvSpPr txBox="1"/>
+          <p:nvPr/>
+        </p:nvSpPr>
+        <p:spPr>
+          <a:xfrm>
+            <a:off x="1735200" y="1576800"/>
+            <a:ext cx="1440000" cy="133351"/>
+          </a:xfrm>
+          <a:prstGeom prst="rect">
+            <a:avLst/>
+          </a:prstGeom>
+          <a:noFill/>
+        </p:spPr>
+        <p:txBody>
+          <a:bodyPr wrap="square" lIns="0" rIns="0" tIns="0" bIns="0" anchor="t">
+            <a:spAutoFit/>
+          </a:bodyPr>
+          <a:lstStyle/>
+          <a:p>
+            <a:pPr algn="l">
+              <a:lnSpc>
                 <a:spcPts val="1015"/>
               </a:lnSpc>
             </a:pPr>
             <a:r>
               <a:rPr sz="700" b="0">
                 <a:solidFill>
-                  <a:srgbClr val="431920"/>
+                  <a:srgbClr val="12151C"/>
                 </a:solidFill>
                 <a:latin typeface="맑은 고딕"/>
                 <a:ea typeface="맑은 고딕"/>
@@ -3568,7 +3598,7 @@
     <p:bg>
       <p:bgPr>
         <a:solidFill>
-          <a:srgbClr val="FFFFFF"/>
+          <a:srgbClr val="ECEEFF"/>
         </a:solidFill>
         <a:effectLst/>
       </p:bgPr>
@@ -3595,7 +3625,7 @@
             <a:avLst/>
           </a:prstGeom>
           <a:solidFill>
-            <a:srgbClr val="8D3443"/>
+            <a:srgbClr val="3D5AFE"/>
           </a:solidFill>
           <a:ln>
             <a:noFill/>
@@ -3617,8 +3647,8 @@
         </p:nvSpPr>
         <p:spPr>
           <a:xfrm>
-            <a:off x="1462505" y="374400"/>
-            <a:ext cx="314990" cy="299573"/>
+            <a:off x="2412000" y="972000"/>
+            <a:ext cx="828000" cy="828000"/>
           </a:xfrm>
           <a:custGeom>
             <a:avLst/>
@@ -3627,43 +3657,91 @@
             <a:cxnLst/>
             <a:rect l="l" t="t" r="r" b="b"/>
             <a:pathLst>
-              <a:path w="314990" h="299573">
+              <a:path w="828000" h="828000">
                 <a:moveTo>
-                  <a:pt x="157495" y="0"/>
+                  <a:pt x="828000" y="828000"/>
                 </a:moveTo>
                 <a:lnTo>
-                  <a:pt x="197700" y="110263"/>
+                  <a:pt x="0" y="828000"/>
                 </a:lnTo>
                 <a:lnTo>
-                  <a:pt x="314990" y="114427"/>
+                  <a:pt x="1773" y="773846"/>
                 </a:lnTo>
                 <a:lnTo>
-                  <a:pt x="222547" y="186737"/>
+                  <a:pt x="7084" y="719924"/>
                 </a:lnTo>
                 <a:lnTo>
-                  <a:pt x="254832" y="299573"/>
+                  <a:pt x="15910" y="666465"/>
                 </a:lnTo>
                 <a:lnTo>
-                  <a:pt x="157495" y="234000"/>
+                  <a:pt x="28213" y="613698"/>
                 </a:lnTo>
                 <a:lnTo>
-                  <a:pt x="60158" y="299573"/>
+                  <a:pt x="43942" y="561848"/>
                 </a:lnTo>
                 <a:lnTo>
-                  <a:pt x="92443" y="186737"/>
+                  <a:pt x="63028" y="511138"/>
                 </a:lnTo>
                 <a:lnTo>
-                  <a:pt x="0" y="114427"/>
+                  <a:pt x="85389" y="461785"/>
                 </a:lnTo>
                 <a:lnTo>
-                  <a:pt x="117290" y="110263"/>
+                  <a:pt x="110931" y="414000"/>
+                </a:lnTo>
+                <a:lnTo>
+                  <a:pt x="139543" y="367988"/>
+                </a:lnTo>
+                <a:lnTo>
+                  <a:pt x="171103" y="323946"/>
+                </a:lnTo>
+                <a:lnTo>
+                  <a:pt x="205477" y="282062"/>
+                </a:lnTo>
+                <a:lnTo>
+                  <a:pt x="242516" y="242516"/>
+                </a:lnTo>
+                <a:lnTo>
+                  <a:pt x="282062" y="205477"/>
+                </a:lnTo>
+                <a:lnTo>
+                  <a:pt x="323946" y="171103"/>
+                </a:lnTo>
+                <a:lnTo>
+                  <a:pt x="367988" y="139543"/>
+                </a:lnTo>
+                <a:lnTo>
+                  <a:pt x="414000" y="110931"/>
+                </a:lnTo>
+                <a:lnTo>
+                  <a:pt x="461785" y="85389"/>
+                </a:lnTo>
+                <a:lnTo>
+                  <a:pt x="511138" y="63028"/>
+                </a:lnTo>
+                <a:lnTo>
+                  <a:pt x="561848" y="43942"/>
+                </a:lnTo>
+                <a:lnTo>
+                  <a:pt x="613698" y="28213"/>
+                </a:lnTo>
+                <a:lnTo>
+                  <a:pt x="666465" y="15910"/>
+                </a:lnTo>
+                <a:lnTo>
+                  <a:pt x="719924" y="7084"/>
+                </a:lnTo>
+                <a:lnTo>
+                  <a:pt x="773846" y="1773"/>
+                </a:lnTo>
+                <a:lnTo>
+                  <a:pt x="828000" y="0"/>
                 </a:lnTo>
                 <a:close/>
               </a:path>
             </a:pathLst>
           </a:custGeom>
           <a:solidFill>
-            <a:srgbClr val="FFFFFF"/>
+            <a:srgbClr val="687EFE"/>
           </a:solidFill>
           <a:ln>
             <a:noFill/>
@@ -3685,8 +3763,8 @@
         </p:nvSpPr>
         <p:spPr>
           <a:xfrm>
-            <a:off x="396000" y="835200"/>
-            <a:ext cx="2448000" cy="396000"/>
+            <a:off x="252000" y="432000"/>
+            <a:ext cx="2304000" cy="720000"/>
           </a:xfrm>
           <a:prstGeom prst="rect">
             <a:avLst/>
@@ -3694,18 +3772,18 @@
           <a:noFill/>
         </p:spPr>
         <p:txBody>
-          <a:bodyPr wrap="square" lIns="0" rIns="0" tIns="0" bIns="0" anchor="ctr">
+          <a:bodyPr wrap="square" lIns="0" rIns="0" tIns="0" bIns="0" anchor="t">
             <a:spAutoFit/>
           </a:bodyPr>
           <a:lstStyle/>
           <a:p>
-            <a:pPr algn="ctr">
+            <a:pPr algn="l">
               <a:lnSpc>
-                <a:spcPts val="1667"/>
+                <a:spcPts val="1884"/>
               </a:lnSpc>
             </a:pPr>
             <a:r>
-              <a:rPr sz="1150" b="1">
+              <a:rPr sz="1300" b="1">
                 <a:solidFill>
                   <a:srgbClr val="FFFFFF"/>
                 </a:solidFill>
@@ -3725,8 +3803,8 @@
         </p:nvSpPr>
         <p:spPr>
           <a:xfrm>
-            <a:off x="360000" y="1476000"/>
-            <a:ext cx="2520000" cy="108000"/>
+            <a:off x="252000" y="1476000"/>
+            <a:ext cx="1800000" cy="133351"/>
           </a:xfrm>
           <a:prstGeom prst="rect">
             <a:avLst/>
@@ -3739,13 +3817,13 @@
           </a:bodyPr>
           <a:lstStyle/>
           <a:p>
-            <a:pPr algn="ctr">
+            <a:pPr algn="l">
               <a:lnSpc>
                 <a:spcPts val="1015"/>
               </a:lnSpc>
             </a:pPr>
             <a:r>
-              <a:rPr sz="700" b="1" spc="300">
+              <a:rPr sz="700" b="1" spc="200">
                 <a:solidFill>
                   <a:srgbClr val="FFFFFF"/>
                 </a:solidFill>

--- a/public/fun/cards/food/food-38.pptx
+++ b/public/fun/cards/food/food-38.pptx
@@ -3106,7 +3106,7 @@
         <p:spPr>
           <a:xfrm>
             <a:off x="0" y="0"/>
-            <a:ext cx="1152000" cy="1800000"/>
+            <a:ext cx="756000" cy="1800000"/>
           </a:xfrm>
           <a:prstGeom prst="rect">
             <a:avLst/>
@@ -3126,27 +3126,573 @@
           </a:p>
         </p:txBody>
       </p:sp>
-      <p:sp>
-        <p:nvSpPr>
-          <p:cNvPr id="3" name="Oval 2"/>
-          <p:cNvSpPr/>
-          <p:nvPr/>
-        </p:nvSpPr>
-        <p:spPr>
-          <a:xfrm>
-            <a:off x="295200" y="619200"/>
-            <a:ext cx="561600" cy="561600"/>
-          </a:xfrm>
-          <a:prstGeom prst="ellipse">
-            <a:avLst/>
-          </a:prstGeom>
-          <a:noFill/>
-          <a:ln w="10800">
+      <p:cxnSp>
+        <p:nvCxnSpPr>
+          <p:cNvPr id="3" name="Connector 2"/>
+          <p:cNvCxnSpPr/>
+          <p:nvPr/>
+        </p:nvCxnSpPr>
+        <p:spPr>
+          <a:xfrm flipV="1">
+            <a:off x="0" y="1224000"/>
+            <a:ext cx="50400" cy="50400"/>
+          </a:xfrm>
+          <a:prstGeom prst="line">
+            <a:avLst/>
+          </a:prstGeom>
+          <a:ln w="3600">
             <a:solidFill>
               <a:srgbClr val="FFFFFF"/>
             </a:solidFill>
           </a:ln>
         </p:spPr>
+      </p:cxnSp>
+      <p:cxnSp>
+        <p:nvCxnSpPr>
+          <p:cNvPr id="4" name="Connector 3"/>
+          <p:cNvCxnSpPr/>
+          <p:nvPr/>
+        </p:nvCxnSpPr>
+        <p:spPr>
+          <a:xfrm flipV="1">
+            <a:off x="0" y="1224000"/>
+            <a:ext cx="100800" cy="100800"/>
+          </a:xfrm>
+          <a:prstGeom prst="line">
+            <a:avLst/>
+          </a:prstGeom>
+          <a:ln w="3600">
+            <a:solidFill>
+              <a:srgbClr val="FFFFFF"/>
+            </a:solidFill>
+          </a:ln>
+        </p:spPr>
+      </p:cxnSp>
+      <p:cxnSp>
+        <p:nvCxnSpPr>
+          <p:cNvPr id="5" name="Connector 4"/>
+          <p:cNvCxnSpPr/>
+          <p:nvPr/>
+        </p:nvCxnSpPr>
+        <p:spPr>
+          <a:xfrm flipV="1">
+            <a:off x="0" y="1224000"/>
+            <a:ext cx="151200" cy="151200"/>
+          </a:xfrm>
+          <a:prstGeom prst="line">
+            <a:avLst/>
+          </a:prstGeom>
+          <a:ln w="3600">
+            <a:solidFill>
+              <a:srgbClr val="FFFFFF"/>
+            </a:solidFill>
+          </a:ln>
+        </p:spPr>
+      </p:cxnSp>
+      <p:cxnSp>
+        <p:nvCxnSpPr>
+          <p:cNvPr id="6" name="Connector 5"/>
+          <p:cNvCxnSpPr/>
+          <p:nvPr/>
+        </p:nvCxnSpPr>
+        <p:spPr>
+          <a:xfrm flipV="1">
+            <a:off x="0" y="1224000"/>
+            <a:ext cx="201600" cy="201600"/>
+          </a:xfrm>
+          <a:prstGeom prst="line">
+            <a:avLst/>
+          </a:prstGeom>
+          <a:ln w="3600">
+            <a:solidFill>
+              <a:srgbClr val="FFFFFF"/>
+            </a:solidFill>
+          </a:ln>
+        </p:spPr>
+      </p:cxnSp>
+      <p:cxnSp>
+        <p:nvCxnSpPr>
+          <p:cNvPr id="7" name="Connector 6"/>
+          <p:cNvCxnSpPr/>
+          <p:nvPr/>
+        </p:nvCxnSpPr>
+        <p:spPr>
+          <a:xfrm flipV="1">
+            <a:off x="0" y="1224000"/>
+            <a:ext cx="252000" cy="252000"/>
+          </a:xfrm>
+          <a:prstGeom prst="line">
+            <a:avLst/>
+          </a:prstGeom>
+          <a:ln w="3600">
+            <a:solidFill>
+              <a:srgbClr val="FFFFFF"/>
+            </a:solidFill>
+          </a:ln>
+        </p:spPr>
+      </p:cxnSp>
+      <p:cxnSp>
+        <p:nvCxnSpPr>
+          <p:cNvPr id="8" name="Connector 7"/>
+          <p:cNvCxnSpPr/>
+          <p:nvPr/>
+        </p:nvCxnSpPr>
+        <p:spPr>
+          <a:xfrm flipV="1">
+            <a:off x="0" y="1224000"/>
+            <a:ext cx="302400" cy="302400"/>
+          </a:xfrm>
+          <a:prstGeom prst="line">
+            <a:avLst/>
+          </a:prstGeom>
+          <a:ln w="3600">
+            <a:solidFill>
+              <a:srgbClr val="FFFFFF"/>
+            </a:solidFill>
+          </a:ln>
+        </p:spPr>
+      </p:cxnSp>
+      <p:cxnSp>
+        <p:nvCxnSpPr>
+          <p:cNvPr id="9" name="Connector 8"/>
+          <p:cNvCxnSpPr/>
+          <p:nvPr/>
+        </p:nvCxnSpPr>
+        <p:spPr>
+          <a:xfrm flipV="1">
+            <a:off x="0" y="1224000"/>
+            <a:ext cx="352800" cy="352800"/>
+          </a:xfrm>
+          <a:prstGeom prst="line">
+            <a:avLst/>
+          </a:prstGeom>
+          <a:ln w="3600">
+            <a:solidFill>
+              <a:srgbClr val="FFFFFF"/>
+            </a:solidFill>
+          </a:ln>
+        </p:spPr>
+      </p:cxnSp>
+      <p:cxnSp>
+        <p:nvCxnSpPr>
+          <p:cNvPr id="10" name="Connector 9"/>
+          <p:cNvCxnSpPr/>
+          <p:nvPr/>
+        </p:nvCxnSpPr>
+        <p:spPr>
+          <a:xfrm flipV="1">
+            <a:off x="0" y="1224000"/>
+            <a:ext cx="403200" cy="403200"/>
+          </a:xfrm>
+          <a:prstGeom prst="line">
+            <a:avLst/>
+          </a:prstGeom>
+          <a:ln w="3600">
+            <a:solidFill>
+              <a:srgbClr val="FFFFFF"/>
+            </a:solidFill>
+          </a:ln>
+        </p:spPr>
+      </p:cxnSp>
+      <p:cxnSp>
+        <p:nvCxnSpPr>
+          <p:cNvPr id="11" name="Connector 10"/>
+          <p:cNvCxnSpPr/>
+          <p:nvPr/>
+        </p:nvCxnSpPr>
+        <p:spPr>
+          <a:xfrm flipV="1">
+            <a:off x="0" y="1224000"/>
+            <a:ext cx="453600" cy="453600"/>
+          </a:xfrm>
+          <a:prstGeom prst="line">
+            <a:avLst/>
+          </a:prstGeom>
+          <a:ln w="3600">
+            <a:solidFill>
+              <a:srgbClr val="FFFFFF"/>
+            </a:solidFill>
+          </a:ln>
+        </p:spPr>
+      </p:cxnSp>
+      <p:cxnSp>
+        <p:nvCxnSpPr>
+          <p:cNvPr id="12" name="Connector 11"/>
+          <p:cNvCxnSpPr/>
+          <p:nvPr/>
+        </p:nvCxnSpPr>
+        <p:spPr>
+          <a:xfrm flipV="1">
+            <a:off x="0" y="1224000"/>
+            <a:ext cx="504000" cy="504000"/>
+          </a:xfrm>
+          <a:prstGeom prst="line">
+            <a:avLst/>
+          </a:prstGeom>
+          <a:ln w="3600">
+            <a:solidFill>
+              <a:srgbClr val="FFFFFF"/>
+            </a:solidFill>
+          </a:ln>
+        </p:spPr>
+      </p:cxnSp>
+      <p:cxnSp>
+        <p:nvCxnSpPr>
+          <p:cNvPr id="13" name="Connector 12"/>
+          <p:cNvCxnSpPr/>
+          <p:nvPr/>
+        </p:nvCxnSpPr>
+        <p:spPr>
+          <a:xfrm flipV="1">
+            <a:off x="0" y="1224000"/>
+            <a:ext cx="554400" cy="554400"/>
+          </a:xfrm>
+          <a:prstGeom prst="line">
+            <a:avLst/>
+          </a:prstGeom>
+          <a:ln w="3600">
+            <a:solidFill>
+              <a:srgbClr val="FFFFFF"/>
+            </a:solidFill>
+          </a:ln>
+        </p:spPr>
+      </p:cxnSp>
+      <p:cxnSp>
+        <p:nvCxnSpPr>
+          <p:cNvPr id="14" name="Connector 13"/>
+          <p:cNvCxnSpPr/>
+          <p:nvPr/>
+        </p:nvCxnSpPr>
+        <p:spPr>
+          <a:xfrm flipV="1">
+            <a:off x="28800" y="1224000"/>
+            <a:ext cx="576000" cy="576000"/>
+          </a:xfrm>
+          <a:prstGeom prst="line">
+            <a:avLst/>
+          </a:prstGeom>
+          <a:ln w="3600">
+            <a:solidFill>
+              <a:srgbClr val="FFFFFF"/>
+            </a:solidFill>
+          </a:ln>
+        </p:spPr>
+      </p:cxnSp>
+      <p:cxnSp>
+        <p:nvCxnSpPr>
+          <p:cNvPr id="15" name="Connector 14"/>
+          <p:cNvCxnSpPr/>
+          <p:nvPr/>
+        </p:nvCxnSpPr>
+        <p:spPr>
+          <a:xfrm flipV="1">
+            <a:off x="79200" y="1224000"/>
+            <a:ext cx="576000" cy="576000"/>
+          </a:xfrm>
+          <a:prstGeom prst="line">
+            <a:avLst/>
+          </a:prstGeom>
+          <a:ln w="3600">
+            <a:solidFill>
+              <a:srgbClr val="FFFFFF"/>
+            </a:solidFill>
+          </a:ln>
+        </p:spPr>
+      </p:cxnSp>
+      <p:cxnSp>
+        <p:nvCxnSpPr>
+          <p:cNvPr id="16" name="Connector 15"/>
+          <p:cNvCxnSpPr/>
+          <p:nvPr/>
+        </p:nvCxnSpPr>
+        <p:spPr>
+          <a:xfrm flipV="1">
+            <a:off x="129600" y="1224000"/>
+            <a:ext cx="576000" cy="576000"/>
+          </a:xfrm>
+          <a:prstGeom prst="line">
+            <a:avLst/>
+          </a:prstGeom>
+          <a:ln w="3600">
+            <a:solidFill>
+              <a:srgbClr val="FFFFFF"/>
+            </a:solidFill>
+          </a:ln>
+        </p:spPr>
+      </p:cxnSp>
+      <p:cxnSp>
+        <p:nvCxnSpPr>
+          <p:cNvPr id="17" name="Connector 16"/>
+          <p:cNvCxnSpPr/>
+          <p:nvPr/>
+        </p:nvCxnSpPr>
+        <p:spPr>
+          <a:xfrm flipV="1">
+            <a:off x="180000" y="1224000"/>
+            <a:ext cx="576000" cy="576000"/>
+          </a:xfrm>
+          <a:prstGeom prst="line">
+            <a:avLst/>
+          </a:prstGeom>
+          <a:ln w="3600">
+            <a:solidFill>
+              <a:srgbClr val="FFFFFF"/>
+            </a:solidFill>
+          </a:ln>
+        </p:spPr>
+      </p:cxnSp>
+      <p:cxnSp>
+        <p:nvCxnSpPr>
+          <p:cNvPr id="18" name="Connector 17"/>
+          <p:cNvCxnSpPr/>
+          <p:nvPr/>
+        </p:nvCxnSpPr>
+        <p:spPr>
+          <a:xfrm flipV="1">
+            <a:off x="230400" y="1274400"/>
+            <a:ext cx="525600" cy="525600"/>
+          </a:xfrm>
+          <a:prstGeom prst="line">
+            <a:avLst/>
+          </a:prstGeom>
+          <a:ln w="3600">
+            <a:solidFill>
+              <a:srgbClr val="FFFFFF"/>
+            </a:solidFill>
+          </a:ln>
+        </p:spPr>
+      </p:cxnSp>
+      <p:cxnSp>
+        <p:nvCxnSpPr>
+          <p:cNvPr id="19" name="Connector 18"/>
+          <p:cNvCxnSpPr/>
+          <p:nvPr/>
+        </p:nvCxnSpPr>
+        <p:spPr>
+          <a:xfrm flipV="1">
+            <a:off x="280800" y="1324800"/>
+            <a:ext cx="475200" cy="475200"/>
+          </a:xfrm>
+          <a:prstGeom prst="line">
+            <a:avLst/>
+          </a:prstGeom>
+          <a:ln w="3600">
+            <a:solidFill>
+              <a:srgbClr val="FFFFFF"/>
+            </a:solidFill>
+          </a:ln>
+        </p:spPr>
+      </p:cxnSp>
+      <p:cxnSp>
+        <p:nvCxnSpPr>
+          <p:cNvPr id="20" name="Connector 19"/>
+          <p:cNvCxnSpPr/>
+          <p:nvPr/>
+        </p:nvCxnSpPr>
+        <p:spPr>
+          <a:xfrm flipV="1">
+            <a:off x="331200" y="1375200"/>
+            <a:ext cx="424800" cy="424800"/>
+          </a:xfrm>
+          <a:prstGeom prst="line">
+            <a:avLst/>
+          </a:prstGeom>
+          <a:ln w="3600">
+            <a:solidFill>
+              <a:srgbClr val="FFFFFF"/>
+            </a:solidFill>
+          </a:ln>
+        </p:spPr>
+      </p:cxnSp>
+      <p:cxnSp>
+        <p:nvCxnSpPr>
+          <p:cNvPr id="21" name="Connector 20"/>
+          <p:cNvCxnSpPr/>
+          <p:nvPr/>
+        </p:nvCxnSpPr>
+        <p:spPr>
+          <a:xfrm flipV="1">
+            <a:off x="381600" y="1425600"/>
+            <a:ext cx="374400" cy="374400"/>
+          </a:xfrm>
+          <a:prstGeom prst="line">
+            <a:avLst/>
+          </a:prstGeom>
+          <a:ln w="3600">
+            <a:solidFill>
+              <a:srgbClr val="FFFFFF"/>
+            </a:solidFill>
+          </a:ln>
+        </p:spPr>
+      </p:cxnSp>
+      <p:cxnSp>
+        <p:nvCxnSpPr>
+          <p:cNvPr id="22" name="Connector 21"/>
+          <p:cNvCxnSpPr/>
+          <p:nvPr/>
+        </p:nvCxnSpPr>
+        <p:spPr>
+          <a:xfrm flipV="1">
+            <a:off x="432000" y="1476000"/>
+            <a:ext cx="324000" cy="324000"/>
+          </a:xfrm>
+          <a:prstGeom prst="line">
+            <a:avLst/>
+          </a:prstGeom>
+          <a:ln w="3600">
+            <a:solidFill>
+              <a:srgbClr val="FFFFFF"/>
+            </a:solidFill>
+          </a:ln>
+        </p:spPr>
+      </p:cxnSp>
+      <p:cxnSp>
+        <p:nvCxnSpPr>
+          <p:cNvPr id="23" name="Connector 22"/>
+          <p:cNvCxnSpPr/>
+          <p:nvPr/>
+        </p:nvCxnSpPr>
+        <p:spPr>
+          <a:xfrm flipV="1">
+            <a:off x="482400" y="1526400"/>
+            <a:ext cx="273600" cy="273600"/>
+          </a:xfrm>
+          <a:prstGeom prst="line">
+            <a:avLst/>
+          </a:prstGeom>
+          <a:ln w="3600">
+            <a:solidFill>
+              <a:srgbClr val="FFFFFF"/>
+            </a:solidFill>
+          </a:ln>
+        </p:spPr>
+      </p:cxnSp>
+      <p:cxnSp>
+        <p:nvCxnSpPr>
+          <p:cNvPr id="24" name="Connector 23"/>
+          <p:cNvCxnSpPr/>
+          <p:nvPr/>
+        </p:nvCxnSpPr>
+        <p:spPr>
+          <a:xfrm flipV="1">
+            <a:off x="532800" y="1576800"/>
+            <a:ext cx="223200" cy="223200"/>
+          </a:xfrm>
+          <a:prstGeom prst="line">
+            <a:avLst/>
+          </a:prstGeom>
+          <a:ln w="3600">
+            <a:solidFill>
+              <a:srgbClr val="FFFFFF"/>
+            </a:solidFill>
+          </a:ln>
+        </p:spPr>
+      </p:cxnSp>
+      <p:cxnSp>
+        <p:nvCxnSpPr>
+          <p:cNvPr id="25" name="Connector 24"/>
+          <p:cNvCxnSpPr/>
+          <p:nvPr/>
+        </p:nvCxnSpPr>
+        <p:spPr>
+          <a:xfrm flipV="1">
+            <a:off x="583200" y="1627200"/>
+            <a:ext cx="172800" cy="172800"/>
+          </a:xfrm>
+          <a:prstGeom prst="line">
+            <a:avLst/>
+          </a:prstGeom>
+          <a:ln w="3600">
+            <a:solidFill>
+              <a:srgbClr val="FFFFFF"/>
+            </a:solidFill>
+          </a:ln>
+        </p:spPr>
+      </p:cxnSp>
+      <p:cxnSp>
+        <p:nvCxnSpPr>
+          <p:cNvPr id="26" name="Connector 25"/>
+          <p:cNvCxnSpPr/>
+          <p:nvPr/>
+        </p:nvCxnSpPr>
+        <p:spPr>
+          <a:xfrm flipV="1">
+            <a:off x="633600" y="1677600"/>
+            <a:ext cx="122400" cy="122400"/>
+          </a:xfrm>
+          <a:prstGeom prst="line">
+            <a:avLst/>
+          </a:prstGeom>
+          <a:ln w="3600">
+            <a:solidFill>
+              <a:srgbClr val="FFFFFF"/>
+            </a:solidFill>
+          </a:ln>
+        </p:spPr>
+      </p:cxnSp>
+      <p:cxnSp>
+        <p:nvCxnSpPr>
+          <p:cNvPr id="27" name="Connector 26"/>
+          <p:cNvCxnSpPr/>
+          <p:nvPr/>
+        </p:nvCxnSpPr>
+        <p:spPr>
+          <a:xfrm flipV="1">
+            <a:off x="684000" y="1728000"/>
+            <a:ext cx="72000" cy="72000"/>
+          </a:xfrm>
+          <a:prstGeom prst="line">
+            <a:avLst/>
+          </a:prstGeom>
+          <a:ln w="3600">
+            <a:solidFill>
+              <a:srgbClr val="FFFFFF"/>
+            </a:solidFill>
+          </a:ln>
+        </p:spPr>
+      </p:cxnSp>
+      <p:cxnSp>
+        <p:nvCxnSpPr>
+          <p:cNvPr id="28" name="Connector 27"/>
+          <p:cNvCxnSpPr/>
+          <p:nvPr/>
+        </p:nvCxnSpPr>
+        <p:spPr>
+          <a:xfrm flipV="1">
+            <a:off x="734400" y="1778400"/>
+            <a:ext cx="21600" cy="21600"/>
+          </a:xfrm>
+          <a:prstGeom prst="line">
+            <a:avLst/>
+          </a:prstGeom>
+          <a:ln w="3600">
+            <a:solidFill>
+              <a:srgbClr val="FFFFFF"/>
+            </a:solidFill>
+          </a:ln>
+        </p:spPr>
+      </p:cxnSp>
+      <p:sp>
+        <p:nvSpPr>
+          <p:cNvPr id="29" name="Oval 28"/>
+          <p:cNvSpPr/>
+          <p:nvPr/>
+        </p:nvSpPr>
+        <p:spPr>
+          <a:xfrm>
+            <a:off x="212400" y="374400"/>
+            <a:ext cx="331200" cy="331200"/>
+          </a:xfrm>
+          <a:prstGeom prst="ellipse">
+            <a:avLst/>
+          </a:prstGeom>
+          <a:noFill/>
+          <a:ln w="5760">
+            <a:solidFill>
+              <a:srgbClr val="FFFFFF"/>
+            </a:solidFill>
+          </a:ln>
+        </p:spPr>
         <p:txBody>
           <a:bodyPr rtlCol="0" anchor="ctr"/>
           <a:lstStyle/>
@@ -3157,14 +3703,14 @@
       </p:sp>
       <p:sp>
         <p:nvSpPr>
-          <p:cNvPr id="4" name="텍스트"/>
+          <p:cNvPr id="30" name="텍스트"/>
           <p:cNvSpPr txBox="1"/>
           <p:nvPr/>
         </p:nvSpPr>
         <p:spPr>
           <a:xfrm>
-            <a:off x="216000" y="684000"/>
-            <a:ext cx="720000" cy="432000"/>
+            <a:off x="198000" y="378000"/>
+            <a:ext cx="360000" cy="324000"/>
           </a:xfrm>
           <a:prstGeom prst="rect">
             <a:avLst/>
@@ -3179,32 +3725,32 @@
           <a:p>
             <a:pPr algn="ctr">
               <a:lnSpc>
-                <a:spcPts val="4930"/>
+                <a:spcPts val="2320"/>
               </a:lnSpc>
             </a:pPr>
             <a:r>
-              <a:rPr sz="3400" b="1">
+              <a:rPr sz="1600" b="1">
                 <a:solidFill>
                   <a:srgbClr val="FFFFFF"/>
                 </a:solidFill>
                 <a:latin typeface="맑은 고딕"/>
                 <a:ea typeface="맑은 고딕"/>
               </a:rPr>
-              <a:t>피</a:t>
-            </a:r>
-          </a:p>
-        </p:txBody>
-      </p:sp>
-      <p:sp>
-        <p:nvSpPr>
-          <p:cNvPr id="5" name="텍스트"/>
+              <a:t>상</a:t>
+            </a:r>
+          </a:p>
+        </p:txBody>
+      </p:sp>
+      <p:sp>
+        <p:nvSpPr>
+          <p:cNvPr id="31" name="텍스트"/>
           <p:cNvSpPr txBox="1"/>
           <p:nvPr/>
         </p:nvSpPr>
         <p:spPr>
           <a:xfrm>
-            <a:off x="1404000" y="223200"/>
-            <a:ext cx="1584000" cy="133351"/>
+            <a:off x="936000" y="252000"/>
+            <a:ext cx="1548000" cy="123826"/>
           </a:xfrm>
           <a:prstGeom prst="rect">
             <a:avLst/>
@@ -3219,11 +3765,11 @@
           <a:p>
             <a:pPr algn="l">
               <a:lnSpc>
-                <a:spcPts val="1015"/>
+                <a:spcPts val="942"/>
               </a:lnSpc>
             </a:pPr>
             <a:r>
-              <a:rPr sz="700" b="1" spc="200">
+              <a:rPr sz="650" b="1" spc="220">
                 <a:solidFill>
                   <a:srgbClr val="222F72"/>
                 </a:solidFill>
@@ -3235,16 +3781,37 @@
           </a:p>
         </p:txBody>
       </p:sp>
-      <p:sp>
-        <p:nvSpPr>
-          <p:cNvPr id="6" name="텍스트"/>
+      <p:cxnSp>
+        <p:nvCxnSpPr>
+          <p:cNvPr id="32" name="Connector 31"/>
+          <p:cNvCxnSpPr/>
+          <p:nvPr/>
+        </p:nvCxnSpPr>
+        <p:spPr>
+          <a:xfrm>
+            <a:off x="936000" y="424800"/>
+            <a:ext cx="2052000" cy="0"/>
+          </a:xfrm>
+          <a:prstGeom prst="line">
+            <a:avLst/>
+          </a:prstGeom>
+          <a:ln w="3600">
+            <a:solidFill>
+              <a:srgbClr val="C9D1FF"/>
+            </a:solidFill>
+          </a:ln>
+        </p:spPr>
+      </p:cxnSp>
+      <p:sp>
+        <p:nvSpPr>
+          <p:cNvPr id="33" name="텍스트"/>
           <p:cNvSpPr txBox="1"/>
           <p:nvPr/>
         </p:nvSpPr>
         <p:spPr>
           <a:xfrm>
-            <a:off x="1404000" y="540000"/>
-            <a:ext cx="1584000" cy="360000"/>
+            <a:off x="936000" y="684000"/>
+            <a:ext cx="1800000" cy="237600"/>
           </a:xfrm>
           <a:prstGeom prst="rect">
             <a:avLst/>
@@ -3259,11 +3826,11 @@
           <a:p>
             <a:pPr algn="l">
               <a:lnSpc>
-                <a:spcPts val="3190"/>
+                <a:spcPts val="1957"/>
               </a:lnSpc>
             </a:pPr>
             <a:r>
-              <a:rPr sz="2200" b="1">
+              <a:rPr sz="1350" b="1" spc="120">
                 <a:solidFill>
                   <a:srgbClr val="12151C"/>
                 </a:solidFill>
@@ -3277,14 +3844,14 @@
       </p:sp>
       <p:sp>
         <p:nvSpPr>
-          <p:cNvPr id="7" name="텍스트"/>
+          <p:cNvPr id="34" name="텍스트"/>
           <p:cNvSpPr txBox="1"/>
           <p:nvPr/>
         </p:nvSpPr>
         <p:spPr>
           <a:xfrm>
-            <a:off x="1404000" y="943200"/>
-            <a:ext cx="1584000" cy="171451"/>
+            <a:off x="936000" y="936000"/>
+            <a:ext cx="1800000" cy="133351"/>
           </a:xfrm>
           <a:prstGeom prst="rect">
             <a:avLst/>
@@ -3299,11 +3866,11 @@
           <a:p>
             <a:pPr algn="l">
               <a:lnSpc>
-                <a:spcPts val="1305"/>
+                <a:spcPts val="1015"/>
               </a:lnSpc>
             </a:pPr>
             <a:r>
-              <a:rPr sz="900" b="0">
+              <a:rPr sz="700" b="0" spc="60">
                 <a:solidFill>
                   <a:srgbClr val="222F72"/>
                 </a:solidFill>
@@ -3315,45 +3882,37 @@
           </a:p>
         </p:txBody>
       </p:sp>
-      <p:sp>
-        <p:nvSpPr>
-          <p:cNvPr id="8" name="Rectangle 7"/>
-          <p:cNvSpPr/>
-          <p:nvPr/>
-        </p:nvSpPr>
-        <p:spPr>
-          <a:xfrm>
-            <a:off x="1404000" y="1195200"/>
-            <a:ext cx="144000" cy="18000"/>
-          </a:xfrm>
-          <a:prstGeom prst="rect">
-            <a:avLst/>
-          </a:prstGeom>
-          <a:solidFill>
-            <a:srgbClr val="3D5AFE"/>
-          </a:solidFill>
-          <a:ln>
-            <a:noFill/>
+      <p:cxnSp>
+        <p:nvCxnSpPr>
+          <p:cNvPr id="35" name="Connector 34"/>
+          <p:cNvCxnSpPr/>
+          <p:nvPr/>
+        </p:nvCxnSpPr>
+        <p:spPr>
+          <a:xfrm>
+            <a:off x="936000" y="1303200"/>
+            <a:ext cx="2052000" cy="0"/>
+          </a:xfrm>
+          <a:prstGeom prst="line">
+            <a:avLst/>
+          </a:prstGeom>
+          <a:ln w="3600">
+            <a:solidFill>
+              <a:srgbClr val="C9D1FF"/>
+            </a:solidFill>
           </a:ln>
         </p:spPr>
-        <p:txBody>
-          <a:bodyPr rtlCol="0" anchor="ctr"/>
-          <a:lstStyle/>
-          <a:p>
-            <a:pPr algn="ctr"/>
-          </a:p>
-        </p:txBody>
-      </p:sp>
-      <p:sp>
-        <p:nvSpPr>
-          <p:cNvPr id="9" name="텍스트"/>
+      </p:cxnSp>
+      <p:sp>
+        <p:nvSpPr>
+          <p:cNvPr id="36" name="텍스트"/>
           <p:cNvSpPr txBox="1"/>
           <p:nvPr/>
         </p:nvSpPr>
         <p:spPr>
           <a:xfrm>
-            <a:off x="1404000" y="1328400"/>
-            <a:ext cx="331200" cy="99061"/>
+            <a:off x="936000" y="1393200"/>
+            <a:ext cx="331200" cy="91441"/>
           </a:xfrm>
           <a:prstGeom prst="rect">
             <a:avLst/>
@@ -3368,11 +3927,11 @@
           <a:p>
             <a:pPr algn="l">
               <a:lnSpc>
-                <a:spcPts val="754"/>
+                <a:spcPts val="696"/>
               </a:lnSpc>
             </a:pPr>
             <a:r>
-              <a:rPr sz="520" b="1" spc="120">
+              <a:rPr sz="480" b="1" spc="140">
                 <a:solidFill>
                   <a:srgbClr val="222F72"/>
                 </a:solidFill>
@@ -3386,14 +3945,14 @@
       </p:sp>
       <p:sp>
         <p:nvSpPr>
-          <p:cNvPr id="10" name="텍스트"/>
+          <p:cNvPr id="37" name="텍스트"/>
           <p:cNvSpPr txBox="1"/>
           <p:nvPr/>
         </p:nvSpPr>
         <p:spPr>
           <a:xfrm>
-            <a:off x="1735200" y="1317600"/>
-            <a:ext cx="1440000" cy="133351"/>
+            <a:off x="1267200" y="1382400"/>
+            <a:ext cx="1188000" cy="123826"/>
           </a:xfrm>
           <a:prstGeom prst="rect">
             <a:avLst/>
@@ -3408,11 +3967,11 @@
           <a:p>
             <a:pPr algn="l">
               <a:lnSpc>
-                <a:spcPts val="1015"/>
+                <a:spcPts val="942"/>
               </a:lnSpc>
             </a:pPr>
             <a:r>
-              <a:rPr sz="700" b="0">
+              <a:rPr sz="650" b="0">
                 <a:solidFill>
                   <a:srgbClr val="12151C"/>
                 </a:solidFill>
@@ -3426,14 +3985,14 @@
       </p:sp>
       <p:sp>
         <p:nvSpPr>
-          <p:cNvPr id="11" name="텍스트"/>
+          <p:cNvPr id="38" name="텍스트"/>
           <p:cNvSpPr txBox="1"/>
           <p:nvPr/>
         </p:nvSpPr>
         <p:spPr>
           <a:xfrm>
-            <a:off x="1404000" y="1458000"/>
-            <a:ext cx="331200" cy="99061"/>
+            <a:off x="936000" y="1515600"/>
+            <a:ext cx="331200" cy="91441"/>
           </a:xfrm>
           <a:prstGeom prst="rect">
             <a:avLst/>
@@ -3448,11 +4007,11 @@
           <a:p>
             <a:pPr algn="l">
               <a:lnSpc>
-                <a:spcPts val="754"/>
+                <a:spcPts val="696"/>
               </a:lnSpc>
             </a:pPr>
             <a:r>
-              <a:rPr sz="520" b="1" spc="120">
+              <a:rPr sz="480" b="1" spc="140">
                 <a:solidFill>
                   <a:srgbClr val="222F72"/>
                 </a:solidFill>
@@ -3466,14 +4025,14 @@
       </p:sp>
       <p:sp>
         <p:nvSpPr>
-          <p:cNvPr id="12" name="텍스트"/>
+          <p:cNvPr id="39" name="텍스트"/>
           <p:cNvSpPr txBox="1"/>
           <p:nvPr/>
         </p:nvSpPr>
         <p:spPr>
           <a:xfrm>
-            <a:off x="1735200" y="1447200"/>
-            <a:ext cx="1440000" cy="133351"/>
+            <a:off x="1267200" y="1504800"/>
+            <a:ext cx="1188000" cy="123826"/>
           </a:xfrm>
           <a:prstGeom prst="rect">
             <a:avLst/>
@@ -3488,11 +4047,11 @@
           <a:p>
             <a:pPr algn="l">
               <a:lnSpc>
-                <a:spcPts val="1015"/>
+                <a:spcPts val="942"/>
               </a:lnSpc>
             </a:pPr>
             <a:r>
-              <a:rPr sz="700" b="0">
+              <a:rPr sz="650" b="0">
                 <a:solidFill>
                   <a:srgbClr val="12151C"/>
                 </a:solidFill>
@@ -3506,14 +4065,14 @@
       </p:sp>
       <p:sp>
         <p:nvSpPr>
-          <p:cNvPr id="13" name="텍스트"/>
+          <p:cNvPr id="40" name="텍스트"/>
           <p:cNvSpPr txBox="1"/>
           <p:nvPr/>
         </p:nvSpPr>
         <p:spPr>
           <a:xfrm>
-            <a:off x="1404000" y="1587600"/>
-            <a:ext cx="331200" cy="99061"/>
+            <a:off x="936000" y="1638000"/>
+            <a:ext cx="331200" cy="91441"/>
           </a:xfrm>
           <a:prstGeom prst="rect">
             <a:avLst/>
@@ -3528,11 +4087,11 @@
           <a:p>
             <a:pPr algn="l">
               <a:lnSpc>
-                <a:spcPts val="754"/>
+                <a:spcPts val="696"/>
               </a:lnSpc>
             </a:pPr>
             <a:r>
-              <a:rPr sz="520" b="1" spc="120">
+              <a:rPr sz="480" b="1" spc="140">
                 <a:solidFill>
                   <a:srgbClr val="222F72"/>
                 </a:solidFill>
@@ -3546,14 +4105,14 @@
       </p:sp>
       <p:sp>
         <p:nvSpPr>
-          <p:cNvPr id="14" name="텍스트"/>
+          <p:cNvPr id="41" name="텍스트"/>
           <p:cNvSpPr txBox="1"/>
           <p:nvPr/>
         </p:nvSpPr>
         <p:spPr>
           <a:xfrm>
-            <a:off x="1735200" y="1576800"/>
-            <a:ext cx="1440000" cy="133351"/>
+            <a:off x="1267200" y="1627200"/>
+            <a:ext cx="1188000" cy="123826"/>
           </a:xfrm>
           <a:prstGeom prst="rect">
             <a:avLst/>
@@ -3568,11 +4127,11 @@
           <a:p>
             <a:pPr algn="l">
               <a:lnSpc>
-                <a:spcPts val="1015"/>
+                <a:spcPts val="942"/>
               </a:lnSpc>
             </a:pPr>
             <a:r>
-              <a:rPr sz="700" b="0">
+              <a:rPr sz="650" b="0">
                 <a:solidFill>
                   <a:srgbClr val="12151C"/>
                 </a:solidFill>
@@ -3612,14 +4171,54 @@
       <p:grpSpPr/>
       <p:sp>
         <p:nvSpPr>
-          <p:cNvPr id="2" name="Rectangle 1"/>
+          <p:cNvPr id="2" name="텍스트"/>
+          <p:cNvSpPr txBox="1"/>
+          <p:nvPr/>
+        </p:nvSpPr>
+        <p:spPr>
+          <a:xfrm>
+            <a:off x="252000" y="252000"/>
+            <a:ext cx="1080000" cy="99061"/>
+          </a:xfrm>
+          <a:prstGeom prst="rect">
+            <a:avLst/>
+          </a:prstGeom>
+          <a:noFill/>
+        </p:spPr>
+        <p:txBody>
+          <a:bodyPr wrap="square" lIns="0" rIns="0" tIns="0" bIns="0" anchor="t">
+            <a:spAutoFit/>
+          </a:bodyPr>
+          <a:lstStyle/>
+          <a:p>
+            <a:pPr algn="l">
+              <a:lnSpc>
+                <a:spcPts val="754"/>
+              </a:lnSpc>
+            </a:pPr>
+            <a:r>
+              <a:rPr sz="520" b="1" spc="240">
+                <a:solidFill>
+                  <a:srgbClr val="222F72"/>
+                </a:solidFill>
+                <a:latin typeface="맑은 고딕"/>
+                <a:ea typeface="맑은 고딕"/>
+              </a:rPr>
+              <a:t>대표 메뉴</a:t>
+            </a:r>
+          </a:p>
+        </p:txBody>
+      </p:sp>
+      <p:sp>
+        <p:nvSpPr>
+          <p:cNvPr id="3" name="Rectangle 2"/>
           <p:cNvSpPr/>
           <p:nvPr/>
         </p:nvSpPr>
         <p:spPr>
           <a:xfrm>
-            <a:off x="0" y="0"/>
-            <a:ext cx="3240000" cy="1800000"/>
+            <a:off x="252000" y="352800"/>
+            <a:ext cx="108000" cy="14400"/>
           </a:xfrm>
           <a:prstGeom prst="rect">
             <a:avLst/>
@@ -3639,109 +4238,346 @@
           </a:p>
         </p:txBody>
       </p:sp>
-      <p:sp>
-        <p:nvSpPr>
-          <p:cNvPr id="3" name="Freeform 2"/>
+      <p:cxnSp>
+        <p:nvCxnSpPr>
+          <p:cNvPr id="4" name="Connector 3"/>
+          <p:cNvCxnSpPr/>
+          <p:nvPr/>
+        </p:nvCxnSpPr>
+        <p:spPr>
+          <a:xfrm>
+            <a:off x="252000" y="453600"/>
+            <a:ext cx="1512000" cy="0"/>
+          </a:xfrm>
+          <a:prstGeom prst="line">
+            <a:avLst/>
+          </a:prstGeom>
+          <a:ln w="3600">
+            <a:solidFill>
+              <a:srgbClr val="C9D1FF"/>
+            </a:solidFill>
+          </a:ln>
+        </p:spPr>
+      </p:cxnSp>
+      <p:sp>
+        <p:nvSpPr>
+          <p:cNvPr id="5" name="텍스트"/>
+          <p:cNvSpPr txBox="1"/>
+          <p:nvPr/>
+        </p:nvSpPr>
+        <p:spPr>
+          <a:xfrm>
+            <a:off x="252000" y="507600"/>
+            <a:ext cx="216000" cy="95251"/>
+          </a:xfrm>
+          <a:prstGeom prst="rect">
+            <a:avLst/>
+          </a:prstGeom>
+          <a:noFill/>
+        </p:spPr>
+        <p:txBody>
+          <a:bodyPr wrap="square" lIns="0" rIns="0" tIns="0" bIns="0" anchor="t">
+            <a:spAutoFit/>
+          </a:bodyPr>
+          <a:lstStyle/>
+          <a:p>
+            <a:pPr algn="l">
+              <a:lnSpc>
+                <a:spcPts val="725"/>
+              </a:lnSpc>
+            </a:pPr>
+            <a:r>
+              <a:rPr sz="500" b="1" spc="100">
+                <a:solidFill>
+                  <a:srgbClr val="222F72"/>
+                </a:solidFill>
+                <a:latin typeface="맑은 고딕"/>
+                <a:ea typeface="맑은 고딕"/>
+              </a:rPr>
+              <a:t>01</a:t>
+            </a:r>
+          </a:p>
+        </p:txBody>
+      </p:sp>
+      <p:sp>
+        <p:nvSpPr>
+          <p:cNvPr id="6" name="텍스트"/>
+          <p:cNvSpPr txBox="1"/>
+          <p:nvPr/>
+        </p:nvSpPr>
+        <p:spPr>
+          <a:xfrm>
+            <a:off x="489600" y="496800"/>
+            <a:ext cx="1260000" cy="133351"/>
+          </a:xfrm>
+          <a:prstGeom prst="rect">
+            <a:avLst/>
+          </a:prstGeom>
+          <a:noFill/>
+        </p:spPr>
+        <p:txBody>
+          <a:bodyPr wrap="square" lIns="0" rIns="0" tIns="0" bIns="0" anchor="t">
+            <a:spAutoFit/>
+          </a:bodyPr>
+          <a:lstStyle/>
+          <a:p>
+            <a:pPr algn="l">
+              <a:lnSpc>
+                <a:spcPts val="1015"/>
+              </a:lnSpc>
+            </a:pPr>
+            <a:r>
+              <a:rPr sz="700" b="0">
+                <a:solidFill>
+                  <a:srgbClr val="12151C"/>
+                </a:solidFill>
+                <a:latin typeface="맑은 고딕"/>
+                <a:ea typeface="맑은 고딕"/>
+              </a:rPr>
+              <a:t>핸드드립</a:t>
+            </a:r>
+          </a:p>
+        </p:txBody>
+      </p:sp>
+      <p:cxnSp>
+        <p:nvCxnSpPr>
+          <p:cNvPr id="7" name="Connector 6"/>
+          <p:cNvCxnSpPr/>
+          <p:nvPr/>
+        </p:nvCxnSpPr>
+        <p:spPr>
+          <a:xfrm>
+            <a:off x="252000" y="640800"/>
+            <a:ext cx="1512000" cy="0"/>
+          </a:xfrm>
+          <a:prstGeom prst="line">
+            <a:avLst/>
+          </a:prstGeom>
+          <a:ln w="3600">
+            <a:solidFill>
+              <a:srgbClr val="C9D1FF"/>
+            </a:solidFill>
+          </a:ln>
+        </p:spPr>
+      </p:cxnSp>
+      <p:sp>
+        <p:nvSpPr>
+          <p:cNvPr id="8" name="텍스트"/>
+          <p:cNvSpPr txBox="1"/>
+          <p:nvPr/>
+        </p:nvSpPr>
+        <p:spPr>
+          <a:xfrm>
+            <a:off x="252000" y="694800"/>
+            <a:ext cx="216000" cy="95251"/>
+          </a:xfrm>
+          <a:prstGeom prst="rect">
+            <a:avLst/>
+          </a:prstGeom>
+          <a:noFill/>
+        </p:spPr>
+        <p:txBody>
+          <a:bodyPr wrap="square" lIns="0" rIns="0" tIns="0" bIns="0" anchor="t">
+            <a:spAutoFit/>
+          </a:bodyPr>
+          <a:lstStyle/>
+          <a:p>
+            <a:pPr algn="l">
+              <a:lnSpc>
+                <a:spcPts val="725"/>
+              </a:lnSpc>
+            </a:pPr>
+            <a:r>
+              <a:rPr sz="500" b="1" spc="100">
+                <a:solidFill>
+                  <a:srgbClr val="222F72"/>
+                </a:solidFill>
+                <a:latin typeface="맑은 고딕"/>
+                <a:ea typeface="맑은 고딕"/>
+              </a:rPr>
+              <a:t>02</a:t>
+            </a:r>
+          </a:p>
+        </p:txBody>
+      </p:sp>
+      <p:sp>
+        <p:nvSpPr>
+          <p:cNvPr id="9" name="텍스트"/>
+          <p:cNvSpPr txBox="1"/>
+          <p:nvPr/>
+        </p:nvSpPr>
+        <p:spPr>
+          <a:xfrm>
+            <a:off x="489600" y="684000"/>
+            <a:ext cx="1260000" cy="133351"/>
+          </a:xfrm>
+          <a:prstGeom prst="rect">
+            <a:avLst/>
+          </a:prstGeom>
+          <a:noFill/>
+        </p:spPr>
+        <p:txBody>
+          <a:bodyPr wrap="square" lIns="0" rIns="0" tIns="0" bIns="0" anchor="t">
+            <a:spAutoFit/>
+          </a:bodyPr>
+          <a:lstStyle/>
+          <a:p>
+            <a:pPr algn="l">
+              <a:lnSpc>
+                <a:spcPts val="1015"/>
+              </a:lnSpc>
+            </a:pPr>
+            <a:r>
+              <a:rPr sz="700" b="0">
+                <a:solidFill>
+                  <a:srgbClr val="12151C"/>
+                </a:solidFill>
+                <a:latin typeface="맑은 고딕"/>
+                <a:ea typeface="맑은 고딕"/>
+              </a:rPr>
+              <a:t>단체 주문</a:t>
+            </a:r>
+          </a:p>
+        </p:txBody>
+      </p:sp>
+      <p:cxnSp>
+        <p:nvCxnSpPr>
+          <p:cNvPr id="10" name="Connector 9"/>
+          <p:cNvCxnSpPr/>
+          <p:nvPr/>
+        </p:nvCxnSpPr>
+        <p:spPr>
+          <a:xfrm>
+            <a:off x="252000" y="828000"/>
+            <a:ext cx="1512000" cy="0"/>
+          </a:xfrm>
+          <a:prstGeom prst="line">
+            <a:avLst/>
+          </a:prstGeom>
+          <a:ln w="3600">
+            <a:solidFill>
+              <a:srgbClr val="C9D1FF"/>
+            </a:solidFill>
+          </a:ln>
+        </p:spPr>
+      </p:cxnSp>
+      <p:sp>
+        <p:nvSpPr>
+          <p:cNvPr id="11" name="텍스트"/>
+          <p:cNvSpPr txBox="1"/>
+          <p:nvPr/>
+        </p:nvSpPr>
+        <p:spPr>
+          <a:xfrm>
+            <a:off x="252000" y="882000"/>
+            <a:ext cx="216000" cy="95251"/>
+          </a:xfrm>
+          <a:prstGeom prst="rect">
+            <a:avLst/>
+          </a:prstGeom>
+          <a:noFill/>
+        </p:spPr>
+        <p:txBody>
+          <a:bodyPr wrap="square" lIns="0" rIns="0" tIns="0" bIns="0" anchor="t">
+            <a:spAutoFit/>
+          </a:bodyPr>
+          <a:lstStyle/>
+          <a:p>
+            <a:pPr algn="l">
+              <a:lnSpc>
+                <a:spcPts val="725"/>
+              </a:lnSpc>
+            </a:pPr>
+            <a:r>
+              <a:rPr sz="500" b="1" spc="100">
+                <a:solidFill>
+                  <a:srgbClr val="222F72"/>
+                </a:solidFill>
+                <a:latin typeface="맑은 고딕"/>
+                <a:ea typeface="맑은 고딕"/>
+              </a:rPr>
+              <a:t>03</a:t>
+            </a:r>
+          </a:p>
+        </p:txBody>
+      </p:sp>
+      <p:sp>
+        <p:nvSpPr>
+          <p:cNvPr id="12" name="텍스트"/>
+          <p:cNvSpPr txBox="1"/>
+          <p:nvPr/>
+        </p:nvSpPr>
+        <p:spPr>
+          <a:xfrm>
+            <a:off x="489600" y="871200"/>
+            <a:ext cx="1260000" cy="133351"/>
+          </a:xfrm>
+          <a:prstGeom prst="rect">
+            <a:avLst/>
+          </a:prstGeom>
+          <a:noFill/>
+        </p:spPr>
+        <p:txBody>
+          <a:bodyPr wrap="square" lIns="0" rIns="0" tIns="0" bIns="0" anchor="t">
+            <a:spAutoFit/>
+          </a:bodyPr>
+          <a:lstStyle/>
+          <a:p>
+            <a:pPr algn="l">
+              <a:lnSpc>
+                <a:spcPts val="1015"/>
+              </a:lnSpc>
+            </a:pPr>
+            <a:r>
+              <a:rPr sz="700" b="0">
+                <a:solidFill>
+                  <a:srgbClr val="12151C"/>
+                </a:solidFill>
+                <a:latin typeface="맑은 고딕"/>
+                <a:ea typeface="맑은 고딕"/>
+              </a:rPr>
+              <a:t>포장 · 배달</a:t>
+            </a:r>
+          </a:p>
+        </p:txBody>
+      </p:sp>
+      <p:cxnSp>
+        <p:nvCxnSpPr>
+          <p:cNvPr id="13" name="Connector 12"/>
+          <p:cNvCxnSpPr/>
+          <p:nvPr/>
+        </p:nvCxnSpPr>
+        <p:spPr>
+          <a:xfrm>
+            <a:off x="252000" y="1015200"/>
+            <a:ext cx="1512000" cy="0"/>
+          </a:xfrm>
+          <a:prstGeom prst="line">
+            <a:avLst/>
+          </a:prstGeom>
+          <a:ln w="3600">
+            <a:solidFill>
+              <a:srgbClr val="C9D1FF"/>
+            </a:solidFill>
+          </a:ln>
+        </p:spPr>
+      </p:cxnSp>
+      <p:sp>
+        <p:nvSpPr>
+          <p:cNvPr id="14" name="Rectangle 13"/>
           <p:cNvSpPr/>
           <p:nvPr/>
         </p:nvSpPr>
         <p:spPr>
           <a:xfrm>
-            <a:off x="2412000" y="972000"/>
-            <a:ext cx="828000" cy="828000"/>
-          </a:xfrm>
-          <a:custGeom>
-            <a:avLst/>
-            <a:gdLst/>
-            <a:ahLst/>
-            <a:cxnLst/>
-            <a:rect l="l" t="t" r="r" b="b"/>
-            <a:pathLst>
-              <a:path w="828000" h="828000">
-                <a:moveTo>
-                  <a:pt x="828000" y="828000"/>
-                </a:moveTo>
-                <a:lnTo>
-                  <a:pt x="0" y="828000"/>
-                </a:lnTo>
-                <a:lnTo>
-                  <a:pt x="1773" y="773846"/>
-                </a:lnTo>
-                <a:lnTo>
-                  <a:pt x="7084" y="719924"/>
-                </a:lnTo>
-                <a:lnTo>
-                  <a:pt x="15910" y="666465"/>
-                </a:lnTo>
-                <a:lnTo>
-                  <a:pt x="28213" y="613698"/>
-                </a:lnTo>
-                <a:lnTo>
-                  <a:pt x="43942" y="561848"/>
-                </a:lnTo>
-                <a:lnTo>
-                  <a:pt x="63028" y="511138"/>
-                </a:lnTo>
-                <a:lnTo>
-                  <a:pt x="85389" y="461785"/>
-                </a:lnTo>
-                <a:lnTo>
-                  <a:pt x="110931" y="414000"/>
-                </a:lnTo>
-                <a:lnTo>
-                  <a:pt x="139543" y="367988"/>
-                </a:lnTo>
-                <a:lnTo>
-                  <a:pt x="171103" y="323946"/>
-                </a:lnTo>
-                <a:lnTo>
-                  <a:pt x="205477" y="282062"/>
-                </a:lnTo>
-                <a:lnTo>
-                  <a:pt x="242516" y="242516"/>
-                </a:lnTo>
-                <a:lnTo>
-                  <a:pt x="282062" y="205477"/>
-                </a:lnTo>
-                <a:lnTo>
-                  <a:pt x="323946" y="171103"/>
-                </a:lnTo>
-                <a:lnTo>
-                  <a:pt x="367988" y="139543"/>
-                </a:lnTo>
-                <a:lnTo>
-                  <a:pt x="414000" y="110931"/>
-                </a:lnTo>
-                <a:lnTo>
-                  <a:pt x="461785" y="85389"/>
-                </a:lnTo>
-                <a:lnTo>
-                  <a:pt x="511138" y="63028"/>
-                </a:lnTo>
-                <a:lnTo>
-                  <a:pt x="561848" y="43942"/>
-                </a:lnTo>
-                <a:lnTo>
-                  <a:pt x="613698" y="28213"/>
-                </a:lnTo>
-                <a:lnTo>
-                  <a:pt x="666465" y="15910"/>
-                </a:lnTo>
-                <a:lnTo>
-                  <a:pt x="719924" y="7084"/>
-                </a:lnTo>
-                <a:lnTo>
-                  <a:pt x="773846" y="1773"/>
-                </a:lnTo>
-                <a:lnTo>
-                  <a:pt x="828000" y="0"/>
-                </a:lnTo>
-                <a:close/>
-              </a:path>
-            </a:pathLst>
-          </a:custGeom>
+            <a:off x="2088000" y="252000"/>
+            <a:ext cx="900000" cy="1296000"/>
+          </a:xfrm>
+          <a:prstGeom prst="rect">
+            <a:avLst/>
+          </a:prstGeom>
           <a:solidFill>
-            <a:srgbClr val="687EFE"/>
+            <a:srgbClr val="3D5AFE"/>
           </a:solidFill>
           <a:ln>
             <a:noFill/>
@@ -3757,14 +4593,14 @@
       </p:sp>
       <p:sp>
         <p:nvSpPr>
-          <p:cNvPr id="4" name="텍스트"/>
+          <p:cNvPr id="15" name="텍스트"/>
           <p:cNvSpPr txBox="1"/>
           <p:nvPr/>
         </p:nvSpPr>
         <p:spPr>
           <a:xfrm>
-            <a:off x="252000" y="432000"/>
-            <a:ext cx="2304000" cy="720000"/>
+            <a:off x="2196000" y="360000"/>
+            <a:ext cx="684000" cy="95251"/>
           </a:xfrm>
           <a:prstGeom prst="rect">
             <a:avLst/>
@@ -3779,32 +4615,95 @@
           <a:p>
             <a:pPr algn="l">
               <a:lnSpc>
-                <a:spcPts val="1884"/>
+                <a:spcPts val="725"/>
               </a:lnSpc>
             </a:pPr>
             <a:r>
-              <a:rPr sz="1300" b="1">
+              <a:rPr sz="500" b="1" spc="240">
+                <a:solidFill>
+                  <a:srgbClr val="FFFFFF">
+                    <a:alpha val="75000"/>
+                  </a:srgbClr>
+                </a:solidFill>
+                <a:latin typeface="맑은 고딕"/>
+                <a:ea typeface="맑은 고딕"/>
+              </a:rPr>
+              <a:t>INFO</a:t>
+            </a:r>
+          </a:p>
+        </p:txBody>
+      </p:sp>
+      <p:sp>
+        <p:nvSpPr>
+          <p:cNvPr id="16" name="텍스트"/>
+          <p:cNvSpPr txBox="1"/>
+          <p:nvPr/>
+        </p:nvSpPr>
+        <p:spPr>
+          <a:xfrm>
+            <a:off x="2196000" y="504000"/>
+            <a:ext cx="684000" cy="121921"/>
+          </a:xfrm>
+          <a:prstGeom prst="rect">
+            <a:avLst/>
+          </a:prstGeom>
+          <a:noFill/>
+        </p:spPr>
+        <p:txBody>
+          <a:bodyPr wrap="square" lIns="0" rIns="0" tIns="0" bIns="0" anchor="t">
+            <a:spAutoFit/>
+          </a:bodyPr>
+          <a:lstStyle/>
+          <a:p>
+            <a:pPr algn="l">
+              <a:lnSpc>
+                <a:spcPts val="927"/>
+              </a:lnSpc>
+            </a:pPr>
+            <a:r>
+              <a:rPr sz="640" b="1">
                 <a:solidFill>
                   <a:srgbClr val="FFFFFF"/>
                 </a:solidFill>
                 <a:latin typeface="맑은 고딕"/>
                 <a:ea typeface="맑은 고딕"/>
               </a:rPr>
-              <a:t>오가는 길에 들러 쉬어 가세요</a:t>
-            </a:r>
-          </a:p>
-        </p:txBody>
-      </p:sp>
-      <p:sp>
-        <p:nvSpPr>
-          <p:cNvPr id="5" name="텍스트"/>
+              <a:t>매일 10:00 – 22:00</a:t>
+            </a:r>
+          </a:p>
+        </p:txBody>
+      </p:sp>
+      <p:cxnSp>
+        <p:nvCxnSpPr>
+          <p:cNvPr id="17" name="Connector 16"/>
+          <p:cNvCxnSpPr/>
+          <p:nvPr/>
+        </p:nvCxnSpPr>
+        <p:spPr>
+          <a:xfrm>
+            <a:off x="2196000" y="770400"/>
+            <a:ext cx="684000" cy="0"/>
+          </a:xfrm>
+          <a:prstGeom prst="line">
+            <a:avLst/>
+          </a:prstGeom>
+          <a:ln w="3600">
+            <a:solidFill>
+              <a:srgbClr val="FFFFFF"/>
+            </a:solidFill>
+          </a:ln>
+        </p:spPr>
+      </p:cxnSp>
+      <p:sp>
+        <p:nvSpPr>
+          <p:cNvPr id="18" name="텍스트"/>
           <p:cNvSpPr txBox="1"/>
           <p:nvPr/>
         </p:nvSpPr>
         <p:spPr>
           <a:xfrm>
-            <a:off x="252000" y="1476000"/>
-            <a:ext cx="1800000" cy="133351"/>
+            <a:off x="2196000" y="849600"/>
+            <a:ext cx="684000" cy="91441"/>
           </a:xfrm>
           <a:prstGeom prst="rect">
             <a:avLst/>
@@ -3819,11 +4718,93 @@
           <a:p>
             <a:pPr algn="l">
               <a:lnSpc>
-                <a:spcPts val="1015"/>
+                <a:spcPts val="696"/>
               </a:lnSpc>
             </a:pPr>
             <a:r>
-              <a:rPr sz="700" b="1" spc="200">
+              <a:rPr sz="480" b="1" spc="140">
+                <a:solidFill>
+                  <a:srgbClr val="FFFFFF">
+                    <a:alpha val="75000"/>
+                  </a:srgbClr>
+                </a:solidFill>
+                <a:latin typeface="맑은 고딕"/>
+                <a:ea typeface="맑은 고딕"/>
+              </a:rPr>
+              <a:t>KAKAO</a:t>
+            </a:r>
+          </a:p>
+        </p:txBody>
+      </p:sp>
+      <p:sp>
+        <p:nvSpPr>
+          <p:cNvPr id="19" name="텍스트"/>
+          <p:cNvSpPr txBox="1"/>
+          <p:nvPr/>
+        </p:nvSpPr>
+        <p:spPr>
+          <a:xfrm>
+            <a:off x="2196000" y="957600"/>
+            <a:ext cx="684000" cy="121921"/>
+          </a:xfrm>
+          <a:prstGeom prst="rect">
+            <a:avLst/>
+          </a:prstGeom>
+          <a:noFill/>
+        </p:spPr>
+        <p:txBody>
+          <a:bodyPr wrap="square" lIns="0" rIns="0" tIns="0" bIns="0" anchor="t">
+            <a:spAutoFit/>
+          </a:bodyPr>
+          <a:lstStyle/>
+          <a:p>
+            <a:pPr algn="l">
+              <a:lnSpc>
+                <a:spcPts val="927"/>
+              </a:lnSpc>
+            </a:pPr>
+            <a:r>
+              <a:rPr sz="640" b="1">
+                <a:solidFill>
+                  <a:srgbClr val="FFFFFF"/>
+                </a:solidFill>
+                <a:latin typeface="맑은 고딕"/>
+                <a:ea typeface="맑은 고딕"/>
+              </a:rPr>
+              <a:t>@채널아이디</a:t>
+            </a:r>
+          </a:p>
+        </p:txBody>
+      </p:sp>
+      <p:sp>
+        <p:nvSpPr>
+          <p:cNvPr id="20" name="텍스트"/>
+          <p:cNvSpPr txBox="1"/>
+          <p:nvPr/>
+        </p:nvSpPr>
+        <p:spPr>
+          <a:xfrm>
+            <a:off x="2196000" y="1368000"/>
+            <a:ext cx="720000" cy="106681"/>
+          </a:xfrm>
+          <a:prstGeom prst="rect">
+            <a:avLst/>
+          </a:prstGeom>
+          <a:noFill/>
+        </p:spPr>
+        <p:txBody>
+          <a:bodyPr wrap="square" lIns="0" rIns="0" tIns="0" bIns="0" anchor="t">
+            <a:spAutoFit/>
+          </a:bodyPr>
+          <a:lstStyle/>
+          <a:p>
+            <a:pPr algn="l">
+              <a:lnSpc>
+                <a:spcPts val="811"/>
+              </a:lnSpc>
+            </a:pPr>
+            <a:r>
+              <a:rPr sz="560" b="1" spc="80">
                 <a:solidFill>
                   <a:srgbClr val="FFFFFF"/>
                 </a:solidFill>
